--- a/docs/Bilim_OS_презентация.pptx
+++ b/docs/Bilim_OS_презентация.pptx
@@ -1869,7 +1869,7 @@
             <a:avLst/>
           </a:prstGeom>
           <a:solidFill>
-            <a:srgbClr val="E91E8C"/>
+            <a:srgbClr val="1971C2"/>
           </a:solidFill>
           <a:ln/>
         </p:spPr>
@@ -1915,7 +1915,7 @@
             <a:r>
               <a:rPr lang="en-US" sz="7200" b="1" dirty="0">
                 <a:solidFill>
-                  <a:srgbClr val="E91E8C"/>
+                  <a:srgbClr val="1971C2"/>
                 </a:solidFill>
                 <a:latin typeface="Calibri" pitchFamily="34" charset="0"/>
                 <a:ea typeface="Calibri" pitchFamily="34" charset="-122"/>
@@ -1993,7 +1993,7 @@
             <a:r>
               <a:rPr lang="en-US" sz="2000" b="1" dirty="0">
                 <a:solidFill>
-                  <a:srgbClr val="E91E8C"/>
+                  <a:srgbClr val="1971C2"/>
                 </a:solidFill>
                 <a:latin typeface="Calibri" pitchFamily="34" charset="0"/>
                 <a:ea typeface="Calibri" pitchFamily="34" charset="-122"/>
@@ -2046,7 +2046,7 @@
             <a:r>
               <a:rPr lang="en-US" sz="1600" u="sng" dirty="0">
                 <a:solidFill>
-                  <a:srgbClr val="E91E8C"/>
+                  <a:srgbClr val="1971C2"/>
                 </a:solidFill>
                 <a:latin typeface="Calibri" pitchFamily="34" charset="0"/>
                 <a:ea typeface="Calibri" pitchFamily="34" charset="-122"/>
@@ -2165,7 +2165,7 @@
             <a:avLst/>
           </a:prstGeom>
           <a:solidFill>
-            <a:srgbClr val="E91E8C"/>
+            <a:srgbClr val="1971C2"/>
           </a:solidFill>
           <a:ln/>
         </p:spPr>
@@ -2309,7 +2309,7 @@
             <a:r>
               <a:rPr lang="en-US" sz="2000" b="1" dirty="0">
                 <a:solidFill>
-                  <a:srgbClr val="E91E8C"/>
+                  <a:srgbClr val="1971C2"/>
                 </a:solidFill>
                 <a:latin typeface="Calibri" pitchFamily="34" charset="0"/>
                 <a:ea typeface="Calibri" pitchFamily="34" charset="-122"/>
@@ -2337,7 +2337,7 @@
             <a:r>
               <a:rPr lang="en-US" sz="2000" b="1" dirty="0">
                 <a:solidFill>
-                  <a:srgbClr val="E91E8C"/>
+                  <a:srgbClr val="1971C2"/>
                 </a:solidFill>
                 <a:latin typeface="Calibri" pitchFamily="34" charset="0"/>
                 <a:ea typeface="Calibri" pitchFamily="34" charset="-122"/>
@@ -2755,7 +2755,7 @@
                       <a:tailEnd type="none" w="med" len="med"/>
                     </a:lnB>
                     <a:solidFill>
-                      <a:srgbClr val="F7E9F1"/>
+                      <a:srgbClr val="E7F1FB"/>
                     </a:solidFill>
                   </a:tcPr>
                 </a:tc>
@@ -2823,7 +2823,7 @@
                       <a:tailEnd type="none" w="med" len="med"/>
                     </a:lnB>
                     <a:solidFill>
-                      <a:srgbClr val="F7E9F1"/>
+                      <a:srgbClr val="E7F1FB"/>
                     </a:solidFill>
                   </a:tcPr>
                 </a:tc>
@@ -3031,7 +3031,7 @@
                       <a:tailEnd type="none" w="med" len="med"/>
                     </a:lnB>
                     <a:solidFill>
-                      <a:srgbClr val="F7E9F1"/>
+                      <a:srgbClr val="E7F1FB"/>
                     </a:solidFill>
                   </a:tcPr>
                 </a:tc>
@@ -3099,7 +3099,7 @@
                       <a:tailEnd type="none" w="med" len="med"/>
                     </a:lnB>
                     <a:solidFill>
-                      <a:srgbClr val="F7E9F1"/>
+                      <a:srgbClr val="E7F1FB"/>
                     </a:solidFill>
                   </a:tcPr>
                 </a:tc>
@@ -3307,7 +3307,7 @@
                       <a:tailEnd type="none" w="med" len="med"/>
                     </a:lnB>
                     <a:solidFill>
-                      <a:srgbClr val="F7E9F1"/>
+                      <a:srgbClr val="E7F1FB"/>
                     </a:solidFill>
                   </a:tcPr>
                 </a:tc>
@@ -3375,7 +3375,7 @@
                       <a:tailEnd type="none" w="med" len="med"/>
                     </a:lnB>
                     <a:solidFill>
-                      <a:srgbClr val="F7E9F1"/>
+                      <a:srgbClr val="E7F1FB"/>
                     </a:solidFill>
                   </a:tcPr>
                 </a:tc>
@@ -3583,7 +3583,7 @@
                       <a:tailEnd type="none" w="med" len="med"/>
                     </a:lnB>
                     <a:solidFill>
-                      <a:srgbClr val="F7E9F1"/>
+                      <a:srgbClr val="E7F1FB"/>
                     </a:solidFill>
                   </a:tcPr>
                 </a:tc>
@@ -3651,7 +3651,7 @@
                       <a:tailEnd type="none" w="med" len="med"/>
                     </a:lnB>
                     <a:solidFill>
-                      <a:srgbClr val="F7E9F1"/>
+                      <a:srgbClr val="E7F1FB"/>
                     </a:solidFill>
                   </a:tcPr>
                 </a:tc>
@@ -3859,7 +3859,7 @@
                       <a:tailEnd type="none" w="med" len="med"/>
                     </a:lnB>
                     <a:solidFill>
-                      <a:srgbClr val="F7E9F1"/>
+                      <a:srgbClr val="E7F1FB"/>
                     </a:solidFill>
                   </a:tcPr>
                 </a:tc>
@@ -3927,7 +3927,7 @@
                       <a:tailEnd type="none" w="med" len="med"/>
                     </a:lnB>
                     <a:solidFill>
-                      <a:srgbClr val="F7E9F1"/>
+                      <a:srgbClr val="E7F1FB"/>
                     </a:solidFill>
                   </a:tcPr>
                 </a:tc>
@@ -3997,7 +3997,7 @@
                       <a:tailEnd type="none" w="med" len="med"/>
                     </a:lnB>
                     <a:solidFill>
-                      <a:srgbClr val="E91E8C"/>
+                      <a:srgbClr val="1971C2"/>
                     </a:solidFill>
                   </a:tcPr>
                 </a:tc>
@@ -4065,7 +4065,7 @@
                       <a:tailEnd type="none" w="med" len="med"/>
                     </a:lnB>
                     <a:solidFill>
-                      <a:srgbClr val="E91E8C"/>
+                      <a:srgbClr val="1971C2"/>
                     </a:solidFill>
                   </a:tcPr>
                 </a:tc>
@@ -4160,7 +4160,7 @@
             <a:avLst/>
           </a:prstGeom>
           <a:solidFill>
-            <a:srgbClr val="E91E8C"/>
+            <a:srgbClr val="1971C2"/>
           </a:solidFill>
           <a:ln/>
         </p:spPr>
@@ -4304,7 +4304,7 @@
             <a:r>
               <a:rPr lang="en-US" sz="2000" b="1" u="sng" dirty="0">
                 <a:solidFill>
-                  <a:srgbClr val="E91E8C"/>
+                  <a:srgbClr val="1971C2"/>
                 </a:solidFill>
                 <a:latin typeface="Calibri" pitchFamily="34" charset="0"/>
                 <a:ea typeface="Calibri" pitchFamily="34" charset="-122"/>
@@ -4350,7 +4350,7 @@
             <a:r>
               <a:rPr lang="en-US" sz="1600" b="1" dirty="0">
                 <a:solidFill>
-                  <a:srgbClr val="E91E8C"/>
+                  <a:srgbClr val="1971C2"/>
                 </a:solidFill>
                 <a:latin typeface="Calibri" pitchFamily="34" charset="0"/>
                 <a:ea typeface="Calibri" pitchFamily="34" charset="-122"/>
@@ -4591,7 +4591,7 @@
                       <a:tailEnd type="none" w="med" len="med"/>
                     </a:lnB>
                     <a:solidFill>
-                      <a:srgbClr val="F7E9F1"/>
+                      <a:srgbClr val="E7F1FB"/>
                     </a:solidFill>
                   </a:tcPr>
                 </a:tc>
@@ -4659,7 +4659,7 @@
                       <a:tailEnd type="none" w="med" len="med"/>
                     </a:lnB>
                     <a:solidFill>
-                      <a:srgbClr val="F7E9F1"/>
+                      <a:srgbClr val="E7F1FB"/>
                     </a:solidFill>
                   </a:tcPr>
                 </a:tc>
@@ -4867,7 +4867,7 @@
                       <a:tailEnd type="none" w="med" len="med"/>
                     </a:lnB>
                     <a:solidFill>
-                      <a:srgbClr val="F7E9F1"/>
+                      <a:srgbClr val="E7F1FB"/>
                     </a:solidFill>
                   </a:tcPr>
                 </a:tc>
@@ -4935,7 +4935,7 @@
                       <a:tailEnd type="none" w="med" len="med"/>
                     </a:lnB>
                     <a:solidFill>
-                      <a:srgbClr val="F7E9F1"/>
+                      <a:srgbClr val="E7F1FB"/>
                     </a:solidFill>
                   </a:tcPr>
                 </a:tc>
@@ -5135,7 +5135,7 @@
     <p:bg>
       <p:bgPr>
         <a:solidFill>
-          <a:srgbClr val="E91E8C"/>
+          <a:srgbClr val="1971C2"/>
         </a:solidFill>
       </p:bgPr>
     </p:bg>
@@ -5338,7 +5338,7 @@
             <a:avLst/>
           </a:prstGeom>
           <a:solidFill>
-            <a:srgbClr val="E91E8C"/>
+            <a:srgbClr val="1971C2"/>
           </a:solidFill>
           <a:ln/>
         </p:spPr>
@@ -5468,7 +5468,7 @@
             <a:r>
               <a:rPr lang="en-US" sz="2000" b="1" dirty="0">
                 <a:solidFill>
-                  <a:srgbClr val="E91E8C"/>
+                  <a:srgbClr val="1971C2"/>
                 </a:solidFill>
                 <a:latin typeface="Calibri" pitchFamily="34" charset="0"/>
                 <a:ea typeface="Calibri" pitchFamily="34" charset="-122"/>
@@ -5633,7 +5633,7 @@
             <a:avLst/>
           </a:prstGeom>
           <a:solidFill>
-            <a:srgbClr val="E91E8C"/>
+            <a:srgbClr val="1971C2"/>
           </a:solidFill>
           <a:ln/>
         </p:spPr>
@@ -5910,7 +5910,7 @@
             <a:avLst/>
           </a:prstGeom>
           <a:solidFill>
-            <a:srgbClr val="E91E8C"/>
+            <a:srgbClr val="1971C2"/>
           </a:solidFill>
           <a:ln/>
         </p:spPr>
@@ -6242,7 +6242,7 @@
                       <a:tailEnd type="none" w="med" len="med"/>
                     </a:lnB>
                     <a:solidFill>
-                      <a:srgbClr val="F7E9F1"/>
+                      <a:srgbClr val="E7F1FB"/>
                     </a:solidFill>
                   </a:tcPr>
                 </a:tc>
@@ -6310,7 +6310,7 @@
                       <a:tailEnd type="none" w="med" len="med"/>
                     </a:lnB>
                     <a:solidFill>
-                      <a:srgbClr val="F7E9F1"/>
+                      <a:srgbClr val="E7F1FB"/>
                     </a:solidFill>
                   </a:tcPr>
                 </a:tc>
@@ -6518,7 +6518,7 @@
                       <a:tailEnd type="none" w="med" len="med"/>
                     </a:lnB>
                     <a:solidFill>
-                      <a:srgbClr val="F7E9F1"/>
+                      <a:srgbClr val="E7F1FB"/>
                     </a:solidFill>
                   </a:tcPr>
                 </a:tc>
@@ -6586,7 +6586,7 @@
                       <a:tailEnd type="none" w="med" len="med"/>
                     </a:lnB>
                     <a:solidFill>
-                      <a:srgbClr val="F7E9F1"/>
+                      <a:srgbClr val="E7F1FB"/>
                     </a:solidFill>
                   </a:tcPr>
                 </a:tc>
@@ -6794,7 +6794,7 @@
                       <a:tailEnd type="none" w="med" len="med"/>
                     </a:lnB>
                     <a:solidFill>
-                      <a:srgbClr val="F7E9F1"/>
+                      <a:srgbClr val="E7F1FB"/>
                     </a:solidFill>
                   </a:tcPr>
                 </a:tc>
@@ -6862,7 +6862,7 @@
                       <a:tailEnd type="none" w="med" len="med"/>
                     </a:lnB>
                     <a:solidFill>
-                      <a:srgbClr val="F7E9F1"/>
+                      <a:srgbClr val="E7F1FB"/>
                     </a:solidFill>
                   </a:tcPr>
                 </a:tc>
@@ -7070,7 +7070,7 @@
                       <a:tailEnd type="none" w="med" len="med"/>
                     </a:lnB>
                     <a:solidFill>
-                      <a:srgbClr val="F7E9F1"/>
+                      <a:srgbClr val="E7F1FB"/>
                     </a:solidFill>
                   </a:tcPr>
                 </a:tc>
@@ -7138,7 +7138,7 @@
                       <a:tailEnd type="none" w="med" len="med"/>
                     </a:lnB>
                     <a:solidFill>
-                      <a:srgbClr val="F7E9F1"/>
+                      <a:srgbClr val="E7F1FB"/>
                     </a:solidFill>
                   </a:tcPr>
                 </a:tc>
@@ -7332,7 +7332,7 @@
             <a:avLst/>
           </a:prstGeom>
           <a:solidFill>
-            <a:srgbClr val="E91E8C"/>
+            <a:srgbClr val="1971C2"/>
           </a:solidFill>
           <a:ln/>
         </p:spPr>
@@ -7452,11 +7452,11 @@
             </a:avLst>
           </a:prstGeom>
           <a:solidFill>
-            <a:srgbClr val="F7E9F1"/>
+            <a:srgbClr val="E7F1FB"/>
           </a:solidFill>
           <a:ln w="9525">
             <a:solidFill>
-              <a:srgbClr val="E91E8C"/>
+              <a:srgbClr val="1971C2"/>
             </a:solidFill>
             <a:prstDash val="solid"/>
           </a:ln>
@@ -7518,11 +7518,11 @@
             </a:avLst>
           </a:prstGeom>
           <a:solidFill>
-            <a:srgbClr val="F7E9F1"/>
+            <a:srgbClr val="E7F1FB"/>
           </a:solidFill>
           <a:ln w="9525">
             <a:solidFill>
-              <a:srgbClr val="E91E8C"/>
+              <a:srgbClr val="1971C2"/>
             </a:solidFill>
             <a:prstDash val="solid"/>
           </a:ln>
@@ -7584,11 +7584,11 @@
             </a:avLst>
           </a:prstGeom>
           <a:solidFill>
-            <a:srgbClr val="F7E9F1"/>
+            <a:srgbClr val="E7F1FB"/>
           </a:solidFill>
           <a:ln w="9525">
             <a:solidFill>
-              <a:srgbClr val="E91E8C"/>
+              <a:srgbClr val="1971C2"/>
             </a:solidFill>
             <a:prstDash val="solid"/>
           </a:ln>
@@ -7650,11 +7650,11 @@
             </a:avLst>
           </a:prstGeom>
           <a:solidFill>
-            <a:srgbClr val="F7E9F1"/>
+            <a:srgbClr val="E7F1FB"/>
           </a:solidFill>
           <a:ln w="9525">
             <a:solidFill>
-              <a:srgbClr val="E91E8C"/>
+              <a:srgbClr val="1971C2"/>
             </a:solidFill>
             <a:prstDash val="solid"/>
           </a:ln>
@@ -7716,11 +7716,11 @@
             </a:avLst>
           </a:prstGeom>
           <a:solidFill>
-            <a:srgbClr val="F7E9F1"/>
+            <a:srgbClr val="E7F1FB"/>
           </a:solidFill>
           <a:ln w="9525">
             <a:solidFill>
-              <a:srgbClr val="E91E8C"/>
+              <a:srgbClr val="1971C2"/>
             </a:solidFill>
             <a:prstDash val="solid"/>
           </a:ln>
@@ -7782,11 +7782,11 @@
             </a:avLst>
           </a:prstGeom>
           <a:solidFill>
-            <a:srgbClr val="F7E9F1"/>
+            <a:srgbClr val="E7F1FB"/>
           </a:solidFill>
           <a:ln w="9525">
             <a:solidFill>
-              <a:srgbClr val="E91E8C"/>
+              <a:srgbClr val="1971C2"/>
             </a:solidFill>
             <a:prstDash val="solid"/>
           </a:ln>
@@ -7848,11 +7848,11 @@
             </a:avLst>
           </a:prstGeom>
           <a:solidFill>
-            <a:srgbClr val="F7E9F1"/>
+            <a:srgbClr val="E7F1FB"/>
           </a:solidFill>
           <a:ln w="9525">
             <a:solidFill>
-              <a:srgbClr val="E91E8C"/>
+              <a:srgbClr val="1971C2"/>
             </a:solidFill>
             <a:prstDash val="solid"/>
           </a:ln>
@@ -7914,11 +7914,11 @@
             </a:avLst>
           </a:prstGeom>
           <a:solidFill>
-            <a:srgbClr val="F7E9F1"/>
+            <a:srgbClr val="E7F1FB"/>
           </a:solidFill>
           <a:ln w="9525">
             <a:solidFill>
-              <a:srgbClr val="E91E8C"/>
+              <a:srgbClr val="1971C2"/>
             </a:solidFill>
             <a:prstDash val="solid"/>
           </a:ln>
@@ -7980,11 +7980,11 @@
             </a:avLst>
           </a:prstGeom>
           <a:solidFill>
-            <a:srgbClr val="F7E9F1"/>
+            <a:srgbClr val="E7F1FB"/>
           </a:solidFill>
           <a:ln w="9525">
             <a:solidFill>
-              <a:srgbClr val="E91E8C"/>
+              <a:srgbClr val="1971C2"/>
             </a:solidFill>
             <a:prstDash val="solid"/>
           </a:ln>
@@ -8046,11 +8046,11 @@
             </a:avLst>
           </a:prstGeom>
           <a:solidFill>
-            <a:srgbClr val="F7E9F1"/>
+            <a:srgbClr val="E7F1FB"/>
           </a:solidFill>
           <a:ln w="9525">
             <a:solidFill>
-              <a:srgbClr val="E91E8C"/>
+              <a:srgbClr val="1971C2"/>
             </a:solidFill>
             <a:prstDash val="solid"/>
           </a:ln>
@@ -8112,11 +8112,11 @@
             </a:avLst>
           </a:prstGeom>
           <a:solidFill>
-            <a:srgbClr val="F7E9F1"/>
+            <a:srgbClr val="E7F1FB"/>
           </a:solidFill>
           <a:ln w="9525">
             <a:solidFill>
-              <a:srgbClr val="E91E8C"/>
+              <a:srgbClr val="1971C2"/>
             </a:solidFill>
             <a:prstDash val="solid"/>
           </a:ln>
@@ -8178,11 +8178,11 @@
             </a:avLst>
           </a:prstGeom>
           <a:solidFill>
-            <a:srgbClr val="F7E9F1"/>
+            <a:srgbClr val="E7F1FB"/>
           </a:solidFill>
           <a:ln w="9525">
             <a:solidFill>
-              <a:srgbClr val="E91E8C"/>
+              <a:srgbClr val="1971C2"/>
             </a:solidFill>
             <a:prstDash val="solid"/>
           </a:ln>
@@ -8244,11 +8244,11 @@
             </a:avLst>
           </a:prstGeom>
           <a:solidFill>
-            <a:srgbClr val="F7E9F1"/>
+            <a:srgbClr val="E7F1FB"/>
           </a:solidFill>
           <a:ln w="9525">
             <a:solidFill>
-              <a:srgbClr val="E91E8C"/>
+              <a:srgbClr val="1971C2"/>
             </a:solidFill>
             <a:prstDash val="solid"/>
           </a:ln>
@@ -8310,11 +8310,11 @@
             </a:avLst>
           </a:prstGeom>
           <a:solidFill>
-            <a:srgbClr val="F7E9F1"/>
+            <a:srgbClr val="E7F1FB"/>
           </a:solidFill>
           <a:ln w="9525">
             <a:solidFill>
-              <a:srgbClr val="E91E8C"/>
+              <a:srgbClr val="1971C2"/>
             </a:solidFill>
             <a:prstDash val="solid"/>
           </a:ln>
@@ -8376,11 +8376,11 @@
             </a:avLst>
           </a:prstGeom>
           <a:solidFill>
-            <a:srgbClr val="F7E9F1"/>
+            <a:srgbClr val="E7F1FB"/>
           </a:solidFill>
           <a:ln w="9525">
             <a:solidFill>
-              <a:srgbClr val="E91E8C"/>
+              <a:srgbClr val="1971C2"/>
             </a:solidFill>
             <a:prstDash val="solid"/>
           </a:ln>
@@ -8442,11 +8442,11 @@
             </a:avLst>
           </a:prstGeom>
           <a:solidFill>
-            <a:srgbClr val="F7E9F1"/>
+            <a:srgbClr val="E7F1FB"/>
           </a:solidFill>
           <a:ln w="9525">
             <a:solidFill>
-              <a:srgbClr val="E91E8C"/>
+              <a:srgbClr val="1971C2"/>
             </a:solidFill>
             <a:prstDash val="solid"/>
           </a:ln>
@@ -8508,11 +8508,11 @@
             </a:avLst>
           </a:prstGeom>
           <a:solidFill>
-            <a:srgbClr val="F7E9F1"/>
+            <a:srgbClr val="E7F1FB"/>
           </a:solidFill>
           <a:ln w="9525">
             <a:solidFill>
-              <a:srgbClr val="E91E8C"/>
+              <a:srgbClr val="1971C2"/>
             </a:solidFill>
             <a:prstDash val="solid"/>
           </a:ln>
@@ -8574,11 +8574,11 @@
             </a:avLst>
           </a:prstGeom>
           <a:solidFill>
-            <a:srgbClr val="F7E9F1"/>
+            <a:srgbClr val="E7F1FB"/>
           </a:solidFill>
           <a:ln w="9525">
             <a:solidFill>
-              <a:srgbClr val="E91E8C"/>
+              <a:srgbClr val="1971C2"/>
             </a:solidFill>
             <a:prstDash val="solid"/>
           </a:ln>
@@ -8670,7 +8670,7 @@
             <a:avLst/>
           </a:prstGeom>
           <a:solidFill>
-            <a:srgbClr val="E91E8C"/>
+            <a:srgbClr val="1971C2"/>
           </a:solidFill>
           <a:ln/>
         </p:spPr>
@@ -8829,11 +8829,11 @@
             </a:avLst>
           </a:prstGeom>
           <a:solidFill>
-            <a:srgbClr val="F7E9F1"/>
+            <a:srgbClr val="E7F1FB"/>
           </a:solidFill>
           <a:ln w="15875">
             <a:solidFill>
-              <a:srgbClr val="E91E8C"/>
+              <a:srgbClr val="1971C2"/>
             </a:solidFill>
             <a:prstDash val="solid"/>
           </a:ln>
@@ -8920,7 +8920,7 @@
             <a:r>
               <a:rPr lang="en-US" sz="2600" b="1" dirty="0">
                 <a:solidFill>
-                  <a:srgbClr val="E91E8C"/>
+                  <a:srgbClr val="1971C2"/>
                 </a:solidFill>
                 <a:latin typeface="Calibri" pitchFamily="34" charset="0"/>
                 <a:ea typeface="Calibri" pitchFamily="34" charset="-122"/>
@@ -8949,11 +8949,11 @@
             </a:avLst>
           </a:prstGeom>
           <a:solidFill>
-            <a:srgbClr val="F7E9F1"/>
+            <a:srgbClr val="E7F1FB"/>
           </a:solidFill>
           <a:ln w="15875">
             <a:solidFill>
-              <a:srgbClr val="E91E8C"/>
+              <a:srgbClr val="1971C2"/>
             </a:solidFill>
             <a:prstDash val="solid"/>
           </a:ln>
@@ -9040,7 +9040,7 @@
             <a:r>
               <a:rPr lang="en-US" sz="2600" b="1" dirty="0">
                 <a:solidFill>
-                  <a:srgbClr val="E91E8C"/>
+                  <a:srgbClr val="1971C2"/>
                 </a:solidFill>
                 <a:latin typeface="Calibri" pitchFamily="34" charset="0"/>
                 <a:ea typeface="Calibri" pitchFamily="34" charset="-122"/>
@@ -9069,11 +9069,11 @@
             </a:avLst>
           </a:prstGeom>
           <a:solidFill>
-            <a:srgbClr val="F7E9F1"/>
+            <a:srgbClr val="E7F1FB"/>
           </a:solidFill>
           <a:ln w="15875">
             <a:solidFill>
-              <a:srgbClr val="E91E8C"/>
+              <a:srgbClr val="1971C2"/>
             </a:solidFill>
             <a:prstDash val="solid"/>
           </a:ln>
@@ -9160,7 +9160,7 @@
             <a:r>
               <a:rPr lang="en-US" sz="2600" b="1" dirty="0">
                 <a:solidFill>
-                  <a:srgbClr val="E91E8C"/>
+                  <a:srgbClr val="1971C2"/>
                 </a:solidFill>
                 <a:latin typeface="Calibri" pitchFamily="34" charset="0"/>
                 <a:ea typeface="Calibri" pitchFamily="34" charset="-122"/>
@@ -9189,11 +9189,11 @@
             </a:avLst>
           </a:prstGeom>
           <a:solidFill>
-            <a:srgbClr val="E91E8C"/>
+            <a:srgbClr val="1971C2"/>
           </a:solidFill>
           <a:ln w="15875">
             <a:solidFill>
-              <a:srgbClr val="E91E8C"/>
+              <a:srgbClr val="1971C2"/>
             </a:solidFill>
             <a:prstDash val="solid"/>
           </a:ln>
@@ -9339,7 +9339,7 @@
             <a:avLst/>
           </a:prstGeom>
           <a:solidFill>
-            <a:srgbClr val="E91E8C"/>
+            <a:srgbClr val="1971C2"/>
           </a:solidFill>
           <a:ln/>
         </p:spPr>
@@ -9472,7 +9472,7 @@
             <a:r>
               <a:rPr lang="en-US" sz="1700" b="1" dirty="0">
                 <a:solidFill>
-                  <a:srgbClr val="E91E8C"/>
+                  <a:srgbClr val="1971C2"/>
                 </a:solidFill>
                 <a:latin typeface="Calibri" pitchFamily="34" charset="0"/>
                 <a:ea typeface="Calibri" pitchFamily="34" charset="-122"/>
@@ -9508,7 +9508,7 @@
             <a:r>
               <a:rPr lang="en-US" sz="1700" b="1" dirty="0">
                 <a:solidFill>
-                  <a:srgbClr val="E91E8C"/>
+                  <a:srgbClr val="1971C2"/>
                 </a:solidFill>
                 <a:latin typeface="Calibri" pitchFamily="34" charset="0"/>
                 <a:ea typeface="Calibri" pitchFamily="34" charset="-122"/>
@@ -9544,7 +9544,7 @@
             <a:r>
               <a:rPr lang="en-US" sz="1700" b="1" dirty="0">
                 <a:solidFill>
-                  <a:srgbClr val="E91E8C"/>
+                  <a:srgbClr val="1971C2"/>
                 </a:solidFill>
                 <a:latin typeface="Calibri" pitchFamily="34" charset="0"/>
                 <a:ea typeface="Calibri" pitchFamily="34" charset="-122"/>
@@ -9621,7 +9621,7 @@
             <a:avLst/>
           </a:prstGeom>
           <a:solidFill>
-            <a:srgbClr val="E91E8C"/>
+            <a:srgbClr val="1971C2"/>
           </a:solidFill>
           <a:ln/>
         </p:spPr>
@@ -9958,7 +9958,7 @@
             <a:avLst/>
           </a:prstGeom>
           <a:solidFill>
-            <a:srgbClr val="E91E8C"/>
+            <a:srgbClr val="1971C2"/>
           </a:solidFill>
           <a:ln/>
         </p:spPr>
@@ -10260,7 +10260,7 @@
                       <a:tailEnd type="none" w="med" len="med"/>
                     </a:lnB>
                     <a:solidFill>
-                      <a:srgbClr val="E91E8C"/>
+                      <a:srgbClr val="1971C2"/>
                     </a:solidFill>
                   </a:tcPr>
                 </a:tc>
@@ -10604,7 +10604,7 @@
                       <a:tailEnd type="none" w="med" len="med"/>
                     </a:lnB>
                     <a:solidFill>
-                      <a:srgbClr val="F7E9F1"/>
+                      <a:srgbClr val="E7F1FB"/>
                     </a:solidFill>
                   </a:tcPr>
                 </a:tc>
@@ -10672,7 +10672,7 @@
                       <a:tailEnd type="none" w="med" len="med"/>
                     </a:lnB>
                     <a:solidFill>
-                      <a:srgbClr val="F7E9F1"/>
+                      <a:srgbClr val="E7F1FB"/>
                     </a:solidFill>
                   </a:tcPr>
                 </a:tc>
@@ -10740,7 +10740,7 @@
                       <a:tailEnd type="none" w="med" len="med"/>
                     </a:lnB>
                     <a:solidFill>
-                      <a:srgbClr val="F7E9F1"/>
+                      <a:srgbClr val="E7F1FB"/>
                     </a:solidFill>
                   </a:tcPr>
                 </a:tc>
@@ -11016,7 +11016,7 @@
                       <a:tailEnd type="none" w="med" len="med"/>
                     </a:lnB>
                     <a:solidFill>
-                      <a:srgbClr val="F7E9F1"/>
+                      <a:srgbClr val="E7F1FB"/>
                     </a:solidFill>
                   </a:tcPr>
                 </a:tc>
@@ -11084,7 +11084,7 @@
                       <a:tailEnd type="none" w="med" len="med"/>
                     </a:lnB>
                     <a:solidFill>
-                      <a:srgbClr val="F7E9F1"/>
+                      <a:srgbClr val="E7F1FB"/>
                     </a:solidFill>
                   </a:tcPr>
                 </a:tc>
@@ -11152,7 +11152,7 @@
                       <a:tailEnd type="none" w="med" len="med"/>
                     </a:lnB>
                     <a:solidFill>
-                      <a:srgbClr val="F7E9F1"/>
+                      <a:srgbClr val="E7F1FB"/>
                     </a:solidFill>
                   </a:tcPr>
                 </a:tc>
@@ -11428,7 +11428,7 @@
                       <a:tailEnd type="none" w="med" len="med"/>
                     </a:lnB>
                     <a:solidFill>
-                      <a:srgbClr val="F7E9F1"/>
+                      <a:srgbClr val="E7F1FB"/>
                     </a:solidFill>
                   </a:tcPr>
                 </a:tc>
@@ -11496,7 +11496,7 @@
                       <a:tailEnd type="none" w="med" len="med"/>
                     </a:lnB>
                     <a:solidFill>
-                      <a:srgbClr val="F7E9F1"/>
+                      <a:srgbClr val="E7F1FB"/>
                     </a:solidFill>
                   </a:tcPr>
                 </a:tc>
@@ -11564,7 +11564,7 @@
                       <a:tailEnd type="none" w="med" len="med"/>
                     </a:lnB>
                     <a:solidFill>
-                      <a:srgbClr val="F7E9F1"/>
+                      <a:srgbClr val="E7F1FB"/>
                     </a:solidFill>
                   </a:tcPr>
                 </a:tc>
